--- a/Lecture Resources/Lecture Powerpoints/Chunk 9 - Matplotlib.pptx
+++ b/Lecture Resources/Lecture Powerpoints/Chunk 9 - Matplotlib.pptx
@@ -124,6 +124,99 @@
 
 <file path=ppt/changesInfos/changesInfo1.xml><?xml version="1.0" encoding="utf-8"?>
 <pc:chgInfo xmlns:a="http://schemas.openxmlformats.org/drawingml/2006/main" xmlns:r="http://schemas.openxmlformats.org/officeDocument/2006/relationships" xmlns:ac="http://schemas.microsoft.com/office/drawing/2013/main/command" xmlns:pc="http://schemas.microsoft.com/office/powerpoint/2013/main/command">
+  <pc:docChgLst>
+    <pc:chgData name="Jonathan Bollig" userId="8b5d0afe-f106-45e0-8c3f-fd98fa124db1" providerId="ADAL" clId="{891409C9-2319-433B-8001-2E1CE368518E}"/>
+    <pc:docChg chg="custSel addSld delSld modSld">
+      <pc:chgData name="Jonathan Bollig" userId="8b5d0afe-f106-45e0-8c3f-fd98fa124db1" providerId="ADAL" clId="{891409C9-2319-433B-8001-2E1CE368518E}" dt="2025-08-18T13:33:56.347" v="46" actId="47"/>
+      <pc:docMkLst>
+        <pc:docMk/>
+      </pc:docMkLst>
+      <pc:sldChg chg="modSp mod">
+        <pc:chgData name="Jonathan Bollig" userId="8b5d0afe-f106-45e0-8c3f-fd98fa124db1" providerId="ADAL" clId="{891409C9-2319-433B-8001-2E1CE368518E}" dt="2025-08-18T10:03:07.320" v="7" actId="20577"/>
+        <pc:sldMkLst>
+          <pc:docMk/>
+          <pc:sldMk cId="836289018" sldId="256"/>
+        </pc:sldMkLst>
+      </pc:sldChg>
+      <pc:sldChg chg="del">
+        <pc:chgData name="Jonathan Bollig" userId="8b5d0afe-f106-45e0-8c3f-fd98fa124db1" providerId="ADAL" clId="{891409C9-2319-433B-8001-2E1CE368518E}" dt="2025-08-18T09:57:07.527" v="0" actId="47"/>
+        <pc:sldMkLst>
+          <pc:docMk/>
+          <pc:sldMk cId="3656329933" sldId="257"/>
+        </pc:sldMkLst>
+      </pc:sldChg>
+      <pc:sldChg chg="del">
+        <pc:chgData name="Jonathan Bollig" userId="8b5d0afe-f106-45e0-8c3f-fd98fa124db1" providerId="ADAL" clId="{891409C9-2319-433B-8001-2E1CE368518E}" dt="2025-08-18T09:57:07.527" v="0" actId="47"/>
+        <pc:sldMkLst>
+          <pc:docMk/>
+          <pc:sldMk cId="544279955" sldId="258"/>
+        </pc:sldMkLst>
+      </pc:sldChg>
+      <pc:sldChg chg="delSp modSp del mod">
+        <pc:chgData name="Jonathan Bollig" userId="8b5d0afe-f106-45e0-8c3f-fd98fa124db1" providerId="ADAL" clId="{891409C9-2319-433B-8001-2E1CE368518E}" dt="2025-08-18T13:33:56.347" v="46" actId="47"/>
+        <pc:sldMkLst>
+          <pc:docMk/>
+          <pc:sldMk cId="2169503629" sldId="259"/>
+        </pc:sldMkLst>
+      </pc:sldChg>
+      <pc:sldChg chg="add">
+        <pc:chgData name="Jonathan Bollig" userId="8b5d0afe-f106-45e0-8c3f-fd98fa124db1" providerId="ADAL" clId="{891409C9-2319-433B-8001-2E1CE368518E}" dt="2025-08-18T13:33:54.473" v="45"/>
+        <pc:sldMkLst>
+          <pc:docMk/>
+          <pc:sldMk cId="932306145" sldId="260"/>
+        </pc:sldMkLst>
+      </pc:sldChg>
+      <pc:sldChg chg="del">
+        <pc:chgData name="Jonathan Bollig" userId="8b5d0afe-f106-45e0-8c3f-fd98fa124db1" providerId="ADAL" clId="{891409C9-2319-433B-8001-2E1CE368518E}" dt="2025-08-18T09:57:07.527" v="0" actId="47"/>
+        <pc:sldMkLst>
+          <pc:docMk/>
+          <pc:sldMk cId="2533283895" sldId="260"/>
+        </pc:sldMkLst>
+      </pc:sldChg>
+      <pc:sldChg chg="del">
+        <pc:chgData name="Jonathan Bollig" userId="8b5d0afe-f106-45e0-8c3f-fd98fa124db1" providerId="ADAL" clId="{891409C9-2319-433B-8001-2E1CE368518E}" dt="2025-08-18T09:57:07.527" v="0" actId="47"/>
+        <pc:sldMkLst>
+          <pc:docMk/>
+          <pc:sldMk cId="847849653" sldId="261"/>
+        </pc:sldMkLst>
+      </pc:sldChg>
+      <pc:sldChg chg="del">
+        <pc:chgData name="Jonathan Bollig" userId="8b5d0afe-f106-45e0-8c3f-fd98fa124db1" providerId="ADAL" clId="{891409C9-2319-433B-8001-2E1CE368518E}" dt="2025-08-18T09:57:07.527" v="0" actId="47"/>
+        <pc:sldMkLst>
+          <pc:docMk/>
+          <pc:sldMk cId="1908144578" sldId="262"/>
+        </pc:sldMkLst>
+      </pc:sldChg>
+      <pc:sldChg chg="del">
+        <pc:chgData name="Jonathan Bollig" userId="8b5d0afe-f106-45e0-8c3f-fd98fa124db1" providerId="ADAL" clId="{891409C9-2319-433B-8001-2E1CE368518E}" dt="2025-08-18T09:57:07.527" v="0" actId="47"/>
+        <pc:sldMkLst>
+          <pc:docMk/>
+          <pc:sldMk cId="4076698392" sldId="263"/>
+        </pc:sldMkLst>
+      </pc:sldChg>
+      <pc:sldChg chg="del">
+        <pc:chgData name="Jonathan Bollig" userId="8b5d0afe-f106-45e0-8c3f-fd98fa124db1" providerId="ADAL" clId="{891409C9-2319-433B-8001-2E1CE368518E}" dt="2025-08-18T09:57:07.527" v="0" actId="47"/>
+        <pc:sldMkLst>
+          <pc:docMk/>
+          <pc:sldMk cId="3708449378" sldId="264"/>
+        </pc:sldMkLst>
+      </pc:sldChg>
+      <pc:sldChg chg="del">
+        <pc:chgData name="Jonathan Bollig" userId="8b5d0afe-f106-45e0-8c3f-fd98fa124db1" providerId="ADAL" clId="{891409C9-2319-433B-8001-2E1CE368518E}" dt="2025-08-18T09:57:07.527" v="0" actId="47"/>
+        <pc:sldMkLst>
+          <pc:docMk/>
+          <pc:sldMk cId="933916611" sldId="265"/>
+        </pc:sldMkLst>
+      </pc:sldChg>
+      <pc:sldChg chg="del">
+        <pc:chgData name="Jonathan Bollig" userId="8b5d0afe-f106-45e0-8c3f-fd98fa124db1" providerId="ADAL" clId="{891409C9-2319-433B-8001-2E1CE368518E}" dt="2025-08-18T09:57:07.527" v="0" actId="47"/>
+        <pc:sldMkLst>
+          <pc:docMk/>
+          <pc:sldMk cId="2117799034" sldId="266"/>
+        </pc:sldMkLst>
+      </pc:sldChg>
+    </pc:docChg>
+  </pc:docChgLst>
   <pc:docChgLst>
     <pc:chgData name="Jonathan Bollig" userId="8b5d0afe-f106-45e0-8c3f-fd98fa124db1" providerId="ADAL" clId="{B108959E-8160-4214-BA0D-42D2F1070C03}"/>
     <pc:docChg chg="undo custSel addSld modSld sldOrd">
@@ -292,99 +385,6 @@
       </pc:sldChg>
     </pc:docChg>
   </pc:docChgLst>
-  <pc:docChgLst>
-    <pc:chgData name="Jonathan Bollig" userId="8b5d0afe-f106-45e0-8c3f-fd98fa124db1" providerId="ADAL" clId="{891409C9-2319-433B-8001-2E1CE368518E}"/>
-    <pc:docChg chg="custSel addSld delSld modSld">
-      <pc:chgData name="Jonathan Bollig" userId="8b5d0afe-f106-45e0-8c3f-fd98fa124db1" providerId="ADAL" clId="{891409C9-2319-433B-8001-2E1CE368518E}" dt="2025-08-18T13:33:56.347" v="46" actId="47"/>
-      <pc:docMkLst>
-        <pc:docMk/>
-      </pc:docMkLst>
-      <pc:sldChg chg="modSp mod">
-        <pc:chgData name="Jonathan Bollig" userId="8b5d0afe-f106-45e0-8c3f-fd98fa124db1" providerId="ADAL" clId="{891409C9-2319-433B-8001-2E1CE368518E}" dt="2025-08-18T10:03:07.320" v="7" actId="20577"/>
-        <pc:sldMkLst>
-          <pc:docMk/>
-          <pc:sldMk cId="836289018" sldId="256"/>
-        </pc:sldMkLst>
-      </pc:sldChg>
-      <pc:sldChg chg="del">
-        <pc:chgData name="Jonathan Bollig" userId="8b5d0afe-f106-45e0-8c3f-fd98fa124db1" providerId="ADAL" clId="{891409C9-2319-433B-8001-2E1CE368518E}" dt="2025-08-18T09:57:07.527" v="0" actId="47"/>
-        <pc:sldMkLst>
-          <pc:docMk/>
-          <pc:sldMk cId="3656329933" sldId="257"/>
-        </pc:sldMkLst>
-      </pc:sldChg>
-      <pc:sldChg chg="del">
-        <pc:chgData name="Jonathan Bollig" userId="8b5d0afe-f106-45e0-8c3f-fd98fa124db1" providerId="ADAL" clId="{891409C9-2319-433B-8001-2E1CE368518E}" dt="2025-08-18T09:57:07.527" v="0" actId="47"/>
-        <pc:sldMkLst>
-          <pc:docMk/>
-          <pc:sldMk cId="544279955" sldId="258"/>
-        </pc:sldMkLst>
-      </pc:sldChg>
-      <pc:sldChg chg="delSp modSp del mod">
-        <pc:chgData name="Jonathan Bollig" userId="8b5d0afe-f106-45e0-8c3f-fd98fa124db1" providerId="ADAL" clId="{891409C9-2319-433B-8001-2E1CE368518E}" dt="2025-08-18T13:33:56.347" v="46" actId="47"/>
-        <pc:sldMkLst>
-          <pc:docMk/>
-          <pc:sldMk cId="2169503629" sldId="259"/>
-        </pc:sldMkLst>
-      </pc:sldChg>
-      <pc:sldChg chg="add">
-        <pc:chgData name="Jonathan Bollig" userId="8b5d0afe-f106-45e0-8c3f-fd98fa124db1" providerId="ADAL" clId="{891409C9-2319-433B-8001-2E1CE368518E}" dt="2025-08-18T13:33:54.473" v="45"/>
-        <pc:sldMkLst>
-          <pc:docMk/>
-          <pc:sldMk cId="932306145" sldId="260"/>
-        </pc:sldMkLst>
-      </pc:sldChg>
-      <pc:sldChg chg="del">
-        <pc:chgData name="Jonathan Bollig" userId="8b5d0afe-f106-45e0-8c3f-fd98fa124db1" providerId="ADAL" clId="{891409C9-2319-433B-8001-2E1CE368518E}" dt="2025-08-18T09:57:07.527" v="0" actId="47"/>
-        <pc:sldMkLst>
-          <pc:docMk/>
-          <pc:sldMk cId="2533283895" sldId="260"/>
-        </pc:sldMkLst>
-      </pc:sldChg>
-      <pc:sldChg chg="del">
-        <pc:chgData name="Jonathan Bollig" userId="8b5d0afe-f106-45e0-8c3f-fd98fa124db1" providerId="ADAL" clId="{891409C9-2319-433B-8001-2E1CE368518E}" dt="2025-08-18T09:57:07.527" v="0" actId="47"/>
-        <pc:sldMkLst>
-          <pc:docMk/>
-          <pc:sldMk cId="847849653" sldId="261"/>
-        </pc:sldMkLst>
-      </pc:sldChg>
-      <pc:sldChg chg="del">
-        <pc:chgData name="Jonathan Bollig" userId="8b5d0afe-f106-45e0-8c3f-fd98fa124db1" providerId="ADAL" clId="{891409C9-2319-433B-8001-2E1CE368518E}" dt="2025-08-18T09:57:07.527" v="0" actId="47"/>
-        <pc:sldMkLst>
-          <pc:docMk/>
-          <pc:sldMk cId="1908144578" sldId="262"/>
-        </pc:sldMkLst>
-      </pc:sldChg>
-      <pc:sldChg chg="del">
-        <pc:chgData name="Jonathan Bollig" userId="8b5d0afe-f106-45e0-8c3f-fd98fa124db1" providerId="ADAL" clId="{891409C9-2319-433B-8001-2E1CE368518E}" dt="2025-08-18T09:57:07.527" v="0" actId="47"/>
-        <pc:sldMkLst>
-          <pc:docMk/>
-          <pc:sldMk cId="4076698392" sldId="263"/>
-        </pc:sldMkLst>
-      </pc:sldChg>
-      <pc:sldChg chg="del">
-        <pc:chgData name="Jonathan Bollig" userId="8b5d0afe-f106-45e0-8c3f-fd98fa124db1" providerId="ADAL" clId="{891409C9-2319-433B-8001-2E1CE368518E}" dt="2025-08-18T09:57:07.527" v="0" actId="47"/>
-        <pc:sldMkLst>
-          <pc:docMk/>
-          <pc:sldMk cId="3708449378" sldId="264"/>
-        </pc:sldMkLst>
-      </pc:sldChg>
-      <pc:sldChg chg="del">
-        <pc:chgData name="Jonathan Bollig" userId="8b5d0afe-f106-45e0-8c3f-fd98fa124db1" providerId="ADAL" clId="{891409C9-2319-433B-8001-2E1CE368518E}" dt="2025-08-18T09:57:07.527" v="0" actId="47"/>
-        <pc:sldMkLst>
-          <pc:docMk/>
-          <pc:sldMk cId="933916611" sldId="265"/>
-        </pc:sldMkLst>
-      </pc:sldChg>
-      <pc:sldChg chg="del">
-        <pc:chgData name="Jonathan Bollig" userId="8b5d0afe-f106-45e0-8c3f-fd98fa124db1" providerId="ADAL" clId="{891409C9-2319-433B-8001-2E1CE368518E}" dt="2025-08-18T09:57:07.527" v="0" actId="47"/>
-        <pc:sldMkLst>
-          <pc:docMk/>
-          <pc:sldMk cId="2117799034" sldId="266"/>
-        </pc:sldMkLst>
-      </pc:sldChg>
-    </pc:docChg>
-  </pc:docChgLst>
 </pc:chgInfo>
 </file>
 
@@ -497,7 +497,7 @@
           <a:p>
             <a:fld id="{0B6CA2EE-5589-4682-AD7F-744DBF1E81F5}" type="datetimeFigureOut">
               <a:rPr lang="de-DE" smtClean="0"/>
-              <a:t>07.10.2025</a:t>
+              <a:t>08.10.2025</a:t>
             </a:fld>
             <a:endParaRPr lang="de-DE"/>
           </a:p>
@@ -655,7 +655,7 @@
           <a:p>
             <a:fld id="{11422C3B-6429-4381-8F08-B422F3CD22BF}" type="slidenum">
               <a:rPr lang="de-DE" smtClean="0"/>
-              <a:t>‹Nr.›</a:t>
+              <a:t>‹#›</a:t>
             </a:fld>
             <a:endParaRPr lang="de-DE"/>
           </a:p>
@@ -999,7 +999,7 @@
           <a:p>
             <a:fld id="{ADA51F25-4808-47F4-BF6E-BCDC230DB01C}" type="datetimeFigureOut">
               <a:rPr lang="de-DE" smtClean="0"/>
-              <a:t>07.10.2025</a:t>
+              <a:t>08.10.2025</a:t>
             </a:fld>
             <a:endParaRPr lang="de-DE"/>
           </a:p>
@@ -1053,7 +1053,7 @@
           <a:p>
             <a:fld id="{C018A060-D51C-4243-8F88-61D66D5570B8}" type="slidenum">
               <a:rPr lang="de-DE" smtClean="0"/>
-              <a:t>‹Nr.›</a:t>
+              <a:t>‹#›</a:t>
             </a:fld>
             <a:endParaRPr lang="de-DE"/>
           </a:p>
@@ -1197,7 +1197,7 @@
           <a:p>
             <a:fld id="{ADA51F25-4808-47F4-BF6E-BCDC230DB01C}" type="datetimeFigureOut">
               <a:rPr lang="de-DE" smtClean="0"/>
-              <a:t>07.10.2025</a:t>
+              <a:t>08.10.2025</a:t>
             </a:fld>
             <a:endParaRPr lang="de-DE"/>
           </a:p>
@@ -1251,7 +1251,7 @@
           <a:p>
             <a:fld id="{C018A060-D51C-4243-8F88-61D66D5570B8}" type="slidenum">
               <a:rPr lang="de-DE" smtClean="0"/>
-              <a:t>‹Nr.›</a:t>
+              <a:t>‹#›</a:t>
             </a:fld>
             <a:endParaRPr lang="de-DE"/>
           </a:p>
@@ -1405,7 +1405,7 @@
           <a:p>
             <a:fld id="{ADA51F25-4808-47F4-BF6E-BCDC230DB01C}" type="datetimeFigureOut">
               <a:rPr lang="de-DE" smtClean="0"/>
-              <a:t>07.10.2025</a:t>
+              <a:t>08.10.2025</a:t>
             </a:fld>
             <a:endParaRPr lang="de-DE"/>
           </a:p>
@@ -1459,7 +1459,7 @@
           <a:p>
             <a:fld id="{C018A060-D51C-4243-8F88-61D66D5570B8}" type="slidenum">
               <a:rPr lang="de-DE" smtClean="0"/>
-              <a:t>‹Nr.›</a:t>
+              <a:t>‹#›</a:t>
             </a:fld>
             <a:endParaRPr lang="de-DE"/>
           </a:p>
@@ -1603,7 +1603,7 @@
           <a:p>
             <a:fld id="{ADA51F25-4808-47F4-BF6E-BCDC230DB01C}" type="datetimeFigureOut">
               <a:rPr lang="de-DE" smtClean="0"/>
-              <a:t>07.10.2025</a:t>
+              <a:t>08.10.2025</a:t>
             </a:fld>
             <a:endParaRPr lang="de-DE"/>
           </a:p>
@@ -1657,7 +1657,7 @@
           <a:p>
             <a:fld id="{C018A060-D51C-4243-8F88-61D66D5570B8}" type="slidenum">
               <a:rPr lang="de-DE" smtClean="0"/>
-              <a:t>‹Nr.›</a:t>
+              <a:t>‹#›</a:t>
             </a:fld>
             <a:endParaRPr lang="de-DE"/>
           </a:p>
@@ -1878,7 +1878,7 @@
           <a:p>
             <a:fld id="{ADA51F25-4808-47F4-BF6E-BCDC230DB01C}" type="datetimeFigureOut">
               <a:rPr lang="de-DE" smtClean="0"/>
-              <a:t>07.10.2025</a:t>
+              <a:t>08.10.2025</a:t>
             </a:fld>
             <a:endParaRPr lang="de-DE"/>
           </a:p>
@@ -1932,7 +1932,7 @@
           <a:p>
             <a:fld id="{C018A060-D51C-4243-8F88-61D66D5570B8}" type="slidenum">
               <a:rPr lang="de-DE" smtClean="0"/>
-              <a:t>‹Nr.›</a:t>
+              <a:t>‹#›</a:t>
             </a:fld>
             <a:endParaRPr lang="de-DE"/>
           </a:p>
@@ -2143,7 +2143,7 @@
           <a:p>
             <a:fld id="{ADA51F25-4808-47F4-BF6E-BCDC230DB01C}" type="datetimeFigureOut">
               <a:rPr lang="de-DE" smtClean="0"/>
-              <a:t>07.10.2025</a:t>
+              <a:t>08.10.2025</a:t>
             </a:fld>
             <a:endParaRPr lang="de-DE"/>
           </a:p>
@@ -2197,7 +2197,7 @@
           <a:p>
             <a:fld id="{C018A060-D51C-4243-8F88-61D66D5570B8}" type="slidenum">
               <a:rPr lang="de-DE" smtClean="0"/>
-              <a:t>‹Nr.›</a:t>
+              <a:t>‹#›</a:t>
             </a:fld>
             <a:endParaRPr lang="de-DE"/>
           </a:p>
@@ -2555,7 +2555,7 @@
           <a:p>
             <a:fld id="{ADA51F25-4808-47F4-BF6E-BCDC230DB01C}" type="datetimeFigureOut">
               <a:rPr lang="de-DE" smtClean="0"/>
-              <a:t>07.10.2025</a:t>
+              <a:t>08.10.2025</a:t>
             </a:fld>
             <a:endParaRPr lang="de-DE"/>
           </a:p>
@@ -2609,7 +2609,7 @@
           <a:p>
             <a:fld id="{C018A060-D51C-4243-8F88-61D66D5570B8}" type="slidenum">
               <a:rPr lang="de-DE" smtClean="0"/>
-              <a:t>‹Nr.›</a:t>
+              <a:t>‹#›</a:t>
             </a:fld>
             <a:endParaRPr lang="de-DE"/>
           </a:p>
@@ -2696,7 +2696,7 @@
           <a:p>
             <a:fld id="{ADA51F25-4808-47F4-BF6E-BCDC230DB01C}" type="datetimeFigureOut">
               <a:rPr lang="de-DE" smtClean="0"/>
-              <a:t>07.10.2025</a:t>
+              <a:t>08.10.2025</a:t>
             </a:fld>
             <a:endParaRPr lang="de-DE"/>
           </a:p>
@@ -2750,7 +2750,7 @@
           <a:p>
             <a:fld id="{C018A060-D51C-4243-8F88-61D66D5570B8}" type="slidenum">
               <a:rPr lang="de-DE" smtClean="0"/>
-              <a:t>‹Nr.›</a:t>
+              <a:t>‹#›</a:t>
             </a:fld>
             <a:endParaRPr lang="de-DE"/>
           </a:p>
@@ -2809,7 +2809,7 @@
           <a:p>
             <a:fld id="{ADA51F25-4808-47F4-BF6E-BCDC230DB01C}" type="datetimeFigureOut">
               <a:rPr lang="de-DE" smtClean="0"/>
-              <a:t>07.10.2025</a:t>
+              <a:t>08.10.2025</a:t>
             </a:fld>
             <a:endParaRPr lang="de-DE"/>
           </a:p>
@@ -2863,7 +2863,7 @@
           <a:p>
             <a:fld id="{C018A060-D51C-4243-8F88-61D66D5570B8}" type="slidenum">
               <a:rPr lang="de-DE" smtClean="0"/>
-              <a:t>‹Nr.›</a:t>
+              <a:t>‹#›</a:t>
             </a:fld>
             <a:endParaRPr lang="de-DE"/>
           </a:p>
@@ -3120,7 +3120,7 @@
           <a:p>
             <a:fld id="{ADA51F25-4808-47F4-BF6E-BCDC230DB01C}" type="datetimeFigureOut">
               <a:rPr lang="de-DE" smtClean="0"/>
-              <a:t>07.10.2025</a:t>
+              <a:t>08.10.2025</a:t>
             </a:fld>
             <a:endParaRPr lang="de-DE"/>
           </a:p>
@@ -3174,7 +3174,7 @@
           <a:p>
             <a:fld id="{C018A060-D51C-4243-8F88-61D66D5570B8}" type="slidenum">
               <a:rPr lang="de-DE" smtClean="0"/>
-              <a:t>‹Nr.›</a:t>
+              <a:t>‹#›</a:t>
             </a:fld>
             <a:endParaRPr lang="de-DE"/>
           </a:p>
@@ -3408,7 +3408,7 @@
           <a:p>
             <a:fld id="{ADA51F25-4808-47F4-BF6E-BCDC230DB01C}" type="datetimeFigureOut">
               <a:rPr lang="de-DE" smtClean="0"/>
-              <a:t>07.10.2025</a:t>
+              <a:t>08.10.2025</a:t>
             </a:fld>
             <a:endParaRPr lang="de-DE"/>
           </a:p>
@@ -3462,7 +3462,7 @@
           <a:p>
             <a:fld id="{C018A060-D51C-4243-8F88-61D66D5570B8}" type="slidenum">
               <a:rPr lang="de-DE" smtClean="0"/>
-              <a:t>‹Nr.›</a:t>
+              <a:t>‹#›</a:t>
             </a:fld>
             <a:endParaRPr lang="de-DE"/>
           </a:p>
@@ -3649,7 +3649,7 @@
           <a:p>
             <a:fld id="{ADA51F25-4808-47F4-BF6E-BCDC230DB01C}" type="datetimeFigureOut">
               <a:rPr lang="de-DE" smtClean="0"/>
-              <a:t>07.10.2025</a:t>
+              <a:t>08.10.2025</a:t>
             </a:fld>
             <a:endParaRPr lang="de-DE"/>
           </a:p>
@@ -3739,7 +3739,7 @@
           <a:p>
             <a:fld id="{C018A060-D51C-4243-8F88-61D66D5570B8}" type="slidenum">
               <a:rPr lang="de-DE" smtClean="0"/>
-              <a:t>‹Nr.›</a:t>
+              <a:t>‹#›</a:t>
             </a:fld>
             <a:endParaRPr lang="de-DE"/>
           </a:p>
@@ -4082,7 +4082,12 @@
             <p:ph type="ctrTitle"/>
           </p:nvPr>
         </p:nvSpPr>
-        <p:spPr/>
+        <p:spPr>
+          <a:xfrm>
+            <a:off x="1524000" y="1666373"/>
+            <a:ext cx="9144000" cy="2387600"/>
+          </a:xfrm>
+        </p:spPr>
         <p:txBody>
           <a:bodyPr>
             <a:normAutofit fontScale="90000"/>
@@ -4103,8 +4108,11 @@
             <a:br>
               <a:rPr lang="en-US" noProof="0" dirty="0"/>
             </a:br>
-            <a:r>
+            <a:br>
               <a:rPr lang="en-US" noProof="0" dirty="0"/>
+            </a:br>
+            <a:r>
+              <a:rPr lang="en-US" b="1" noProof="0" dirty="0"/>
               <a:t>Chunk 9: Matplotlib</a:t>
             </a:r>
           </a:p>
@@ -4126,7 +4134,12 @@
             <p:ph type="subTitle" idx="1"/>
           </p:nvPr>
         </p:nvSpPr>
-        <p:spPr/>
+        <p:spPr>
+          <a:xfrm>
+            <a:off x="1524000" y="4771081"/>
+            <a:ext cx="9144000" cy="1655762"/>
+          </a:xfrm>
+        </p:spPr>
         <p:txBody>
           <a:bodyPr/>
           <a:lstStyle/>
@@ -4138,10 +4151,9 @@
           </a:p>
           <a:p>
             <a:r>
-              <a:rPr lang="en-US" noProof="0"/>
+              <a:rPr lang="en-US" noProof="0" dirty="0"/>
               <a:t>09.10.2025</a:t>
             </a:r>
-            <a:endParaRPr lang="en-US" noProof="0" dirty="0"/>
           </a:p>
         </p:txBody>
       </p:sp>
@@ -4219,7 +4231,12 @@
             <p:ph idx="1"/>
           </p:nvPr>
         </p:nvSpPr>
-        <p:spPr/>
+        <p:spPr>
+          <a:xfrm>
+            <a:off x="838200" y="2506662"/>
+            <a:ext cx="4520878" cy="4351338"/>
+          </a:xfrm>
+        </p:spPr>
         <p:txBody>
           <a:bodyPr/>
           <a:lstStyle/>
@@ -4262,7 +4279,7 @@
         </p:blipFill>
         <p:spPr>
           <a:xfrm>
-            <a:off x="2935737" y="2331720"/>
+            <a:off x="5979878" y="1690688"/>
             <a:ext cx="5063624" cy="4430267"/>
           </a:xfrm>
           <a:prstGeom prst="rect">
@@ -5044,6 +5061,500 @@
   <p:clrMapOvr>
     <a:masterClrMapping/>
   </p:clrMapOvr>
+  <p:timing>
+    <p:tnLst>
+      <p:par>
+        <p:cTn id="1" dur="indefinite" restart="never" nodeType="tmRoot">
+          <p:childTnLst>
+            <p:seq concurrent="1" nextAc="seek">
+              <p:cTn id="2" dur="indefinite" nodeType="mainSeq">
+                <p:childTnLst>
+                  <p:par>
+                    <p:cTn id="3" fill="hold">
+                      <p:stCondLst>
+                        <p:cond delay="indefinite"/>
+                      </p:stCondLst>
+                      <p:childTnLst>
+                        <p:par>
+                          <p:cTn id="4" fill="hold">
+                            <p:stCondLst>
+                              <p:cond delay="0"/>
+                            </p:stCondLst>
+                            <p:childTnLst>
+                              <p:par>
+                                <p:cTn id="5" presetID="1" presetClass="entr" presetSubtype="0" fill="hold" nodeType="clickEffect">
+                                  <p:stCondLst>
+                                    <p:cond delay="0"/>
+                                  </p:stCondLst>
+                                  <p:childTnLst>
+                                    <p:set>
+                                      <p:cBhvr>
+                                        <p:cTn id="6" dur="1" fill="hold">
+                                          <p:stCondLst>
+                                            <p:cond delay="0"/>
+                                          </p:stCondLst>
+                                        </p:cTn>
+                                        <p:tgtEl>
+                                          <p:spTgt spid="3">
+                                            <p:txEl>
+                                              <p:pRg st="1" end="1"/>
+                                            </p:txEl>
+                                          </p:spTgt>
+                                        </p:tgtEl>
+                                        <p:attrNameLst>
+                                          <p:attrName>style.visibility</p:attrName>
+                                        </p:attrNameLst>
+                                      </p:cBhvr>
+                                      <p:to>
+                                        <p:strVal val="visible"/>
+                                      </p:to>
+                                    </p:set>
+                                  </p:childTnLst>
+                                </p:cTn>
+                              </p:par>
+                              <p:par>
+                                <p:cTn id="7" presetID="1" presetClass="entr" presetSubtype="0" fill="hold" nodeType="withEffect">
+                                  <p:stCondLst>
+                                    <p:cond delay="0"/>
+                                  </p:stCondLst>
+                                  <p:childTnLst>
+                                    <p:set>
+                                      <p:cBhvr>
+                                        <p:cTn id="8" dur="1" fill="hold">
+                                          <p:stCondLst>
+                                            <p:cond delay="0"/>
+                                          </p:stCondLst>
+                                        </p:cTn>
+                                        <p:tgtEl>
+                                          <p:spTgt spid="3">
+                                            <p:txEl>
+                                              <p:pRg st="2" end="2"/>
+                                            </p:txEl>
+                                          </p:spTgt>
+                                        </p:tgtEl>
+                                        <p:attrNameLst>
+                                          <p:attrName>style.visibility</p:attrName>
+                                        </p:attrNameLst>
+                                      </p:cBhvr>
+                                      <p:to>
+                                        <p:strVal val="visible"/>
+                                      </p:to>
+                                    </p:set>
+                                  </p:childTnLst>
+                                </p:cTn>
+                              </p:par>
+                              <p:par>
+                                <p:cTn id="9" presetID="1" presetClass="entr" presetSubtype="0" fill="hold" nodeType="withEffect">
+                                  <p:stCondLst>
+                                    <p:cond delay="0"/>
+                                  </p:stCondLst>
+                                  <p:childTnLst>
+                                    <p:set>
+                                      <p:cBhvr>
+                                        <p:cTn id="10" dur="1" fill="hold">
+                                          <p:stCondLst>
+                                            <p:cond delay="0"/>
+                                          </p:stCondLst>
+                                        </p:cTn>
+                                        <p:tgtEl>
+                                          <p:spTgt spid="3">
+                                            <p:txEl>
+                                              <p:pRg st="3" end="3"/>
+                                            </p:txEl>
+                                          </p:spTgt>
+                                        </p:tgtEl>
+                                        <p:attrNameLst>
+                                          <p:attrName>style.visibility</p:attrName>
+                                        </p:attrNameLst>
+                                      </p:cBhvr>
+                                      <p:to>
+                                        <p:strVal val="visible"/>
+                                      </p:to>
+                                    </p:set>
+                                  </p:childTnLst>
+                                </p:cTn>
+                              </p:par>
+                              <p:par>
+                                <p:cTn id="11" presetID="1" presetClass="entr" presetSubtype="0" fill="hold" nodeType="withEffect">
+                                  <p:stCondLst>
+                                    <p:cond delay="0"/>
+                                  </p:stCondLst>
+                                  <p:childTnLst>
+                                    <p:set>
+                                      <p:cBhvr>
+                                        <p:cTn id="12" dur="1" fill="hold">
+                                          <p:stCondLst>
+                                            <p:cond delay="0"/>
+                                          </p:stCondLst>
+                                        </p:cTn>
+                                        <p:tgtEl>
+                                          <p:spTgt spid="3">
+                                            <p:txEl>
+                                              <p:pRg st="4" end="4"/>
+                                            </p:txEl>
+                                          </p:spTgt>
+                                        </p:tgtEl>
+                                        <p:attrNameLst>
+                                          <p:attrName>style.visibility</p:attrName>
+                                        </p:attrNameLst>
+                                      </p:cBhvr>
+                                      <p:to>
+                                        <p:strVal val="visible"/>
+                                      </p:to>
+                                    </p:set>
+                                  </p:childTnLst>
+                                </p:cTn>
+                              </p:par>
+                              <p:par>
+                                <p:cTn id="13" presetID="1" presetClass="entr" presetSubtype="0" fill="hold" nodeType="withEffect">
+                                  <p:stCondLst>
+                                    <p:cond delay="0"/>
+                                  </p:stCondLst>
+                                  <p:childTnLst>
+                                    <p:set>
+                                      <p:cBhvr>
+                                        <p:cTn id="14" dur="1" fill="hold">
+                                          <p:stCondLst>
+                                            <p:cond delay="0"/>
+                                          </p:stCondLst>
+                                        </p:cTn>
+                                        <p:tgtEl>
+                                          <p:spTgt spid="6"/>
+                                        </p:tgtEl>
+                                        <p:attrNameLst>
+                                          <p:attrName>style.visibility</p:attrName>
+                                        </p:attrNameLst>
+                                      </p:cBhvr>
+                                      <p:to>
+                                        <p:strVal val="visible"/>
+                                      </p:to>
+                                    </p:set>
+                                  </p:childTnLst>
+                                </p:cTn>
+                              </p:par>
+                            </p:childTnLst>
+                          </p:cTn>
+                        </p:par>
+                      </p:childTnLst>
+                    </p:cTn>
+                  </p:par>
+                  <p:par>
+                    <p:cTn id="15" fill="hold">
+                      <p:stCondLst>
+                        <p:cond delay="indefinite"/>
+                      </p:stCondLst>
+                      <p:childTnLst>
+                        <p:par>
+                          <p:cTn id="16" fill="hold">
+                            <p:stCondLst>
+                              <p:cond delay="0"/>
+                            </p:stCondLst>
+                            <p:childTnLst>
+                              <p:par>
+                                <p:cTn id="17" presetID="1" presetClass="entr" presetSubtype="0" fill="hold" nodeType="clickEffect">
+                                  <p:stCondLst>
+                                    <p:cond delay="0"/>
+                                  </p:stCondLst>
+                                  <p:childTnLst>
+                                    <p:set>
+                                      <p:cBhvr>
+                                        <p:cTn id="18" dur="1" fill="hold">
+                                          <p:stCondLst>
+                                            <p:cond delay="0"/>
+                                          </p:stCondLst>
+                                        </p:cTn>
+                                        <p:tgtEl>
+                                          <p:spTgt spid="3">
+                                            <p:txEl>
+                                              <p:pRg st="5" end="5"/>
+                                            </p:txEl>
+                                          </p:spTgt>
+                                        </p:tgtEl>
+                                        <p:attrNameLst>
+                                          <p:attrName>style.visibility</p:attrName>
+                                        </p:attrNameLst>
+                                      </p:cBhvr>
+                                      <p:to>
+                                        <p:strVal val="visible"/>
+                                      </p:to>
+                                    </p:set>
+                                  </p:childTnLst>
+                                </p:cTn>
+                              </p:par>
+                              <p:par>
+                                <p:cTn id="19" presetID="1" presetClass="entr" presetSubtype="0" fill="hold" nodeType="withEffect">
+                                  <p:stCondLst>
+                                    <p:cond delay="0"/>
+                                  </p:stCondLst>
+                                  <p:childTnLst>
+                                    <p:set>
+                                      <p:cBhvr>
+                                        <p:cTn id="20" dur="1" fill="hold">
+                                          <p:stCondLst>
+                                            <p:cond delay="0"/>
+                                          </p:stCondLst>
+                                        </p:cTn>
+                                        <p:tgtEl>
+                                          <p:spTgt spid="3">
+                                            <p:txEl>
+                                              <p:pRg st="6" end="6"/>
+                                            </p:txEl>
+                                          </p:spTgt>
+                                        </p:tgtEl>
+                                        <p:attrNameLst>
+                                          <p:attrName>style.visibility</p:attrName>
+                                        </p:attrNameLst>
+                                      </p:cBhvr>
+                                      <p:to>
+                                        <p:strVal val="visible"/>
+                                      </p:to>
+                                    </p:set>
+                                  </p:childTnLst>
+                                </p:cTn>
+                              </p:par>
+                              <p:par>
+                                <p:cTn id="21" presetID="1" presetClass="entr" presetSubtype="0" fill="hold" nodeType="withEffect">
+                                  <p:stCondLst>
+                                    <p:cond delay="0"/>
+                                  </p:stCondLst>
+                                  <p:childTnLst>
+                                    <p:set>
+                                      <p:cBhvr>
+                                        <p:cTn id="22" dur="1" fill="hold">
+                                          <p:stCondLst>
+                                            <p:cond delay="0"/>
+                                          </p:stCondLst>
+                                        </p:cTn>
+                                        <p:tgtEl>
+                                          <p:spTgt spid="3">
+                                            <p:txEl>
+                                              <p:pRg st="7" end="7"/>
+                                            </p:txEl>
+                                          </p:spTgt>
+                                        </p:tgtEl>
+                                        <p:attrNameLst>
+                                          <p:attrName>style.visibility</p:attrName>
+                                        </p:attrNameLst>
+                                      </p:cBhvr>
+                                      <p:to>
+                                        <p:strVal val="visible"/>
+                                      </p:to>
+                                    </p:set>
+                                  </p:childTnLst>
+                                </p:cTn>
+                              </p:par>
+                              <p:par>
+                                <p:cTn id="23" presetID="1" presetClass="entr" presetSubtype="0" fill="hold" nodeType="withEffect">
+                                  <p:stCondLst>
+                                    <p:cond delay="0"/>
+                                  </p:stCondLst>
+                                  <p:childTnLst>
+                                    <p:set>
+                                      <p:cBhvr>
+                                        <p:cTn id="24" dur="1" fill="hold">
+                                          <p:stCondLst>
+                                            <p:cond delay="0"/>
+                                          </p:stCondLst>
+                                        </p:cTn>
+                                        <p:tgtEl>
+                                          <p:spTgt spid="3">
+                                            <p:txEl>
+                                              <p:pRg st="8" end="8"/>
+                                            </p:txEl>
+                                          </p:spTgt>
+                                        </p:tgtEl>
+                                        <p:attrNameLst>
+                                          <p:attrName>style.visibility</p:attrName>
+                                        </p:attrNameLst>
+                                      </p:cBhvr>
+                                      <p:to>
+                                        <p:strVal val="visible"/>
+                                      </p:to>
+                                    </p:set>
+                                  </p:childTnLst>
+                                </p:cTn>
+                              </p:par>
+                            </p:childTnLst>
+                          </p:cTn>
+                        </p:par>
+                      </p:childTnLst>
+                    </p:cTn>
+                  </p:par>
+                  <p:par>
+                    <p:cTn id="25" fill="hold">
+                      <p:stCondLst>
+                        <p:cond delay="indefinite"/>
+                      </p:stCondLst>
+                      <p:childTnLst>
+                        <p:par>
+                          <p:cTn id="26" fill="hold">
+                            <p:stCondLst>
+                              <p:cond delay="0"/>
+                            </p:stCondLst>
+                            <p:childTnLst>
+                              <p:par>
+                                <p:cTn id="27" presetID="1" presetClass="entr" presetSubtype="0" fill="hold" nodeType="clickEffect">
+                                  <p:stCondLst>
+                                    <p:cond delay="0"/>
+                                  </p:stCondLst>
+                                  <p:childTnLst>
+                                    <p:set>
+                                      <p:cBhvr>
+                                        <p:cTn id="28" dur="1" fill="hold">
+                                          <p:stCondLst>
+                                            <p:cond delay="0"/>
+                                          </p:stCondLst>
+                                        </p:cTn>
+                                        <p:tgtEl>
+                                          <p:spTgt spid="3">
+                                            <p:txEl>
+                                              <p:pRg st="9" end="9"/>
+                                            </p:txEl>
+                                          </p:spTgt>
+                                        </p:tgtEl>
+                                        <p:attrNameLst>
+                                          <p:attrName>style.visibility</p:attrName>
+                                        </p:attrNameLst>
+                                      </p:cBhvr>
+                                      <p:to>
+                                        <p:strVal val="visible"/>
+                                      </p:to>
+                                    </p:set>
+                                  </p:childTnLst>
+                                </p:cTn>
+                              </p:par>
+                              <p:par>
+                                <p:cTn id="29" presetID="1" presetClass="entr" presetSubtype="0" fill="hold" grpId="0" nodeType="withEffect">
+                                  <p:stCondLst>
+                                    <p:cond delay="0"/>
+                                  </p:stCondLst>
+                                  <p:childTnLst>
+                                    <p:set>
+                                      <p:cBhvr>
+                                        <p:cTn id="30" dur="1" fill="hold">
+                                          <p:stCondLst>
+                                            <p:cond delay="0"/>
+                                          </p:stCondLst>
+                                        </p:cTn>
+                                        <p:tgtEl>
+                                          <p:spTgt spid="8"/>
+                                        </p:tgtEl>
+                                        <p:attrNameLst>
+                                          <p:attrName>style.visibility</p:attrName>
+                                        </p:attrNameLst>
+                                      </p:cBhvr>
+                                      <p:to>
+                                        <p:strVal val="visible"/>
+                                      </p:to>
+                                    </p:set>
+                                  </p:childTnLst>
+                                </p:cTn>
+                              </p:par>
+                              <p:par>
+                                <p:cTn id="31" presetID="1" presetClass="entr" presetSubtype="0" fill="hold" grpId="0" nodeType="withEffect">
+                                  <p:stCondLst>
+                                    <p:cond delay="0"/>
+                                  </p:stCondLst>
+                                  <p:childTnLst>
+                                    <p:set>
+                                      <p:cBhvr>
+                                        <p:cTn id="32" dur="1" fill="hold">
+                                          <p:stCondLst>
+                                            <p:cond delay="0"/>
+                                          </p:stCondLst>
+                                        </p:cTn>
+                                        <p:tgtEl>
+                                          <p:spTgt spid="7"/>
+                                        </p:tgtEl>
+                                        <p:attrNameLst>
+                                          <p:attrName>style.visibility</p:attrName>
+                                        </p:attrNameLst>
+                                      </p:cBhvr>
+                                      <p:to>
+                                        <p:strVal val="visible"/>
+                                      </p:to>
+                                    </p:set>
+                                  </p:childTnLst>
+                                </p:cTn>
+                              </p:par>
+                            </p:childTnLst>
+                          </p:cTn>
+                        </p:par>
+                      </p:childTnLst>
+                    </p:cTn>
+                  </p:par>
+                  <p:par>
+                    <p:cTn id="33" fill="hold">
+                      <p:stCondLst>
+                        <p:cond delay="indefinite"/>
+                      </p:stCondLst>
+                      <p:childTnLst>
+                        <p:par>
+                          <p:cTn id="34" fill="hold">
+                            <p:stCondLst>
+                              <p:cond delay="0"/>
+                            </p:stCondLst>
+                            <p:childTnLst>
+                              <p:par>
+                                <p:cTn id="35" presetID="1" presetClass="entr" presetSubtype="0" fill="hold" grpId="0" nodeType="clickEffect">
+                                  <p:stCondLst>
+                                    <p:cond delay="0"/>
+                                  </p:stCondLst>
+                                  <p:childTnLst>
+                                    <p:set>
+                                      <p:cBhvr>
+                                        <p:cTn id="36" dur="1" fill="hold">
+                                          <p:stCondLst>
+                                            <p:cond delay="0"/>
+                                          </p:stCondLst>
+                                        </p:cTn>
+                                        <p:tgtEl>
+                                          <p:spTgt spid="4"/>
+                                        </p:tgtEl>
+                                        <p:attrNameLst>
+                                          <p:attrName>style.visibility</p:attrName>
+                                        </p:attrNameLst>
+                                      </p:cBhvr>
+                                      <p:to>
+                                        <p:strVal val="visible"/>
+                                      </p:to>
+                                    </p:set>
+                                  </p:childTnLst>
+                                </p:cTn>
+                              </p:par>
+                            </p:childTnLst>
+                          </p:cTn>
+                        </p:par>
+                      </p:childTnLst>
+                    </p:cTn>
+                  </p:par>
+                </p:childTnLst>
+              </p:cTn>
+              <p:prevCondLst>
+                <p:cond evt="onPrev" delay="0">
+                  <p:tgtEl>
+                    <p:sldTgt/>
+                  </p:tgtEl>
+                </p:cond>
+              </p:prevCondLst>
+              <p:nextCondLst>
+                <p:cond evt="onNext" delay="0">
+                  <p:tgtEl>
+                    <p:sldTgt/>
+                  </p:tgtEl>
+                </p:cond>
+              </p:nextCondLst>
+            </p:seq>
+          </p:childTnLst>
+        </p:cTn>
+      </p:par>
+    </p:tnLst>
+    <p:bldLst>
+      <p:bldP spid="4" grpId="0" animBg="1"/>
+      <p:bldP spid="7" grpId="0" animBg="1"/>
+      <p:bldP spid="8" grpId="0" animBg="1"/>
+    </p:bldLst>
+  </p:timing>
 </p:sld>
 </file>
 
@@ -6544,6 +7055,281 @@
   <p:clrMapOvr>
     <a:masterClrMapping/>
   </p:clrMapOvr>
+  <p:timing>
+    <p:tnLst>
+      <p:par>
+        <p:cTn id="1" dur="indefinite" restart="never" nodeType="tmRoot">
+          <p:childTnLst>
+            <p:seq concurrent="1" nextAc="seek">
+              <p:cTn id="2" dur="indefinite" nodeType="mainSeq">
+                <p:childTnLst>
+                  <p:par>
+                    <p:cTn id="3" fill="hold">
+                      <p:stCondLst>
+                        <p:cond delay="indefinite"/>
+                      </p:stCondLst>
+                      <p:childTnLst>
+                        <p:par>
+                          <p:cTn id="4" fill="hold">
+                            <p:stCondLst>
+                              <p:cond delay="0"/>
+                            </p:stCondLst>
+                            <p:childTnLst>
+                              <p:par>
+                                <p:cTn id="5" presetID="1" presetClass="entr" presetSubtype="0" fill="hold" nodeType="clickEffect">
+                                  <p:stCondLst>
+                                    <p:cond delay="0"/>
+                                  </p:stCondLst>
+                                  <p:childTnLst>
+                                    <p:set>
+                                      <p:cBhvr>
+                                        <p:cTn id="6" dur="1" fill="hold">
+                                          <p:stCondLst>
+                                            <p:cond delay="0"/>
+                                          </p:stCondLst>
+                                        </p:cTn>
+                                        <p:tgtEl>
+                                          <p:spTgt spid="3">
+                                            <p:txEl>
+                                              <p:pRg st="1" end="1"/>
+                                            </p:txEl>
+                                          </p:spTgt>
+                                        </p:tgtEl>
+                                        <p:attrNameLst>
+                                          <p:attrName>style.visibility</p:attrName>
+                                        </p:attrNameLst>
+                                      </p:cBhvr>
+                                      <p:to>
+                                        <p:strVal val="visible"/>
+                                      </p:to>
+                                    </p:set>
+                                  </p:childTnLst>
+                                </p:cTn>
+                              </p:par>
+                            </p:childTnLst>
+                          </p:cTn>
+                        </p:par>
+                      </p:childTnLst>
+                    </p:cTn>
+                  </p:par>
+                  <p:par>
+                    <p:cTn id="7" fill="hold">
+                      <p:stCondLst>
+                        <p:cond delay="indefinite"/>
+                      </p:stCondLst>
+                      <p:childTnLst>
+                        <p:par>
+                          <p:cTn id="8" fill="hold">
+                            <p:stCondLst>
+                              <p:cond delay="0"/>
+                            </p:stCondLst>
+                            <p:childTnLst>
+                              <p:par>
+                                <p:cTn id="9" presetID="1" presetClass="entr" presetSubtype="0" fill="hold" nodeType="clickEffect">
+                                  <p:stCondLst>
+                                    <p:cond delay="0"/>
+                                  </p:stCondLst>
+                                  <p:childTnLst>
+                                    <p:set>
+                                      <p:cBhvr>
+                                        <p:cTn id="10" dur="1" fill="hold">
+                                          <p:stCondLst>
+                                            <p:cond delay="0"/>
+                                          </p:stCondLst>
+                                        </p:cTn>
+                                        <p:tgtEl>
+                                          <p:spTgt spid="3">
+                                            <p:txEl>
+                                              <p:pRg st="2" end="2"/>
+                                            </p:txEl>
+                                          </p:spTgt>
+                                        </p:tgtEl>
+                                        <p:attrNameLst>
+                                          <p:attrName>style.visibility</p:attrName>
+                                        </p:attrNameLst>
+                                      </p:cBhvr>
+                                      <p:to>
+                                        <p:strVal val="visible"/>
+                                      </p:to>
+                                    </p:set>
+                                  </p:childTnLst>
+                                </p:cTn>
+                              </p:par>
+                              <p:par>
+                                <p:cTn id="11" presetID="1" presetClass="entr" presetSubtype="0" fill="hold" nodeType="withEffect">
+                                  <p:stCondLst>
+                                    <p:cond delay="0"/>
+                                  </p:stCondLst>
+                                  <p:childTnLst>
+                                    <p:set>
+                                      <p:cBhvr>
+                                        <p:cTn id="12" dur="1" fill="hold">
+                                          <p:stCondLst>
+                                            <p:cond delay="0"/>
+                                          </p:stCondLst>
+                                        </p:cTn>
+                                        <p:tgtEl>
+                                          <p:spTgt spid="3">
+                                            <p:txEl>
+                                              <p:pRg st="3" end="3"/>
+                                            </p:txEl>
+                                          </p:spTgt>
+                                        </p:tgtEl>
+                                        <p:attrNameLst>
+                                          <p:attrName>style.visibility</p:attrName>
+                                        </p:attrNameLst>
+                                      </p:cBhvr>
+                                      <p:to>
+                                        <p:strVal val="visible"/>
+                                      </p:to>
+                                    </p:set>
+                                  </p:childTnLst>
+                                </p:cTn>
+                              </p:par>
+                              <p:par>
+                                <p:cTn id="13" presetID="1" presetClass="entr" presetSubtype="0" fill="hold" nodeType="withEffect">
+                                  <p:stCondLst>
+                                    <p:cond delay="0"/>
+                                  </p:stCondLst>
+                                  <p:childTnLst>
+                                    <p:set>
+                                      <p:cBhvr>
+                                        <p:cTn id="14" dur="1" fill="hold">
+                                          <p:stCondLst>
+                                            <p:cond delay="0"/>
+                                          </p:stCondLst>
+                                        </p:cTn>
+                                        <p:tgtEl>
+                                          <p:spTgt spid="3">
+                                            <p:txEl>
+                                              <p:pRg st="4" end="4"/>
+                                            </p:txEl>
+                                          </p:spTgt>
+                                        </p:tgtEl>
+                                        <p:attrNameLst>
+                                          <p:attrName>style.visibility</p:attrName>
+                                        </p:attrNameLst>
+                                      </p:cBhvr>
+                                      <p:to>
+                                        <p:strVal val="visible"/>
+                                      </p:to>
+                                    </p:set>
+                                  </p:childTnLst>
+                                </p:cTn>
+                              </p:par>
+                              <p:par>
+                                <p:cTn id="15" presetID="1" presetClass="entr" presetSubtype="0" fill="hold" nodeType="withEffect">
+                                  <p:stCondLst>
+                                    <p:cond delay="0"/>
+                                  </p:stCondLst>
+                                  <p:childTnLst>
+                                    <p:set>
+                                      <p:cBhvr>
+                                        <p:cTn id="16" dur="1" fill="hold">
+                                          <p:stCondLst>
+                                            <p:cond delay="0"/>
+                                          </p:stCondLst>
+                                        </p:cTn>
+                                        <p:tgtEl>
+                                          <p:spTgt spid="3">
+                                            <p:txEl>
+                                              <p:pRg st="5" end="5"/>
+                                            </p:txEl>
+                                          </p:spTgt>
+                                        </p:tgtEl>
+                                        <p:attrNameLst>
+                                          <p:attrName>style.visibility</p:attrName>
+                                        </p:attrNameLst>
+                                      </p:cBhvr>
+                                      <p:to>
+                                        <p:strVal val="visible"/>
+                                      </p:to>
+                                    </p:set>
+                                  </p:childTnLst>
+                                </p:cTn>
+                              </p:par>
+                              <p:par>
+                                <p:cTn id="17" presetID="1" presetClass="entr" presetSubtype="0" fill="hold" nodeType="withEffect">
+                                  <p:stCondLst>
+                                    <p:cond delay="0"/>
+                                  </p:stCondLst>
+                                  <p:childTnLst>
+                                    <p:set>
+                                      <p:cBhvr>
+                                        <p:cTn id="18" dur="1" fill="hold">
+                                          <p:stCondLst>
+                                            <p:cond delay="0"/>
+                                          </p:stCondLst>
+                                        </p:cTn>
+                                        <p:tgtEl>
+                                          <p:spTgt spid="5"/>
+                                        </p:tgtEl>
+                                        <p:attrNameLst>
+                                          <p:attrName>style.visibility</p:attrName>
+                                        </p:attrNameLst>
+                                      </p:cBhvr>
+                                      <p:to>
+                                        <p:strVal val="visible"/>
+                                      </p:to>
+                                    </p:set>
+                                  </p:childTnLst>
+                                </p:cTn>
+                              </p:par>
+                              <p:par>
+                                <p:cTn id="19" presetID="1" presetClass="entr" presetSubtype="0" fill="hold" nodeType="withEffect">
+                                  <p:stCondLst>
+                                    <p:cond delay="0"/>
+                                  </p:stCondLst>
+                                  <p:childTnLst>
+                                    <p:set>
+                                      <p:cBhvr>
+                                        <p:cTn id="20" dur="1" fill="hold">
+                                          <p:stCondLst>
+                                            <p:cond delay="0"/>
+                                          </p:stCondLst>
+                                        </p:cTn>
+                                        <p:tgtEl>
+                                          <p:spTgt spid="6"/>
+                                        </p:tgtEl>
+                                        <p:attrNameLst>
+                                          <p:attrName>style.visibility</p:attrName>
+                                        </p:attrNameLst>
+                                      </p:cBhvr>
+                                      <p:to>
+                                        <p:strVal val="visible"/>
+                                      </p:to>
+                                    </p:set>
+                                  </p:childTnLst>
+                                </p:cTn>
+                              </p:par>
+                            </p:childTnLst>
+                          </p:cTn>
+                        </p:par>
+                      </p:childTnLst>
+                    </p:cTn>
+                  </p:par>
+                </p:childTnLst>
+              </p:cTn>
+              <p:prevCondLst>
+                <p:cond evt="onPrev" delay="0">
+                  <p:tgtEl>
+                    <p:sldTgt/>
+                  </p:tgtEl>
+                </p:cond>
+              </p:prevCondLst>
+              <p:nextCondLst>
+                <p:cond evt="onNext" delay="0">
+                  <p:tgtEl>
+                    <p:sldTgt/>
+                  </p:tgtEl>
+                </p:cond>
+              </p:nextCondLst>
+            </p:seq>
+          </p:childTnLst>
+        </p:cTn>
+      </p:par>
+    </p:tnLst>
+  </p:timing>
 </p:sld>
 </file>
 
@@ -6627,7 +7413,7 @@
         </p:blipFill>
         <p:spPr>
           <a:xfrm>
-            <a:off x="4017782" y="2449340"/>
+            <a:off x="4017781" y="2237765"/>
             <a:ext cx="4156435" cy="4088619"/>
           </a:xfrm>
           <a:prstGeom prst="rect">
@@ -6649,7 +7435,7 @@
         </p:nvSpPr>
         <p:spPr>
           <a:xfrm>
-            <a:off x="4137412" y="6537959"/>
+            <a:off x="4137412" y="6399459"/>
             <a:ext cx="7059368" cy="276999"/>
           </a:xfrm>
           <a:prstGeom prst="rect">
